--- a/slides/decks/s17-vaccination.pptx
+++ b/slides/decks/s17-vaccination.pptx
@@ -133,13 +133,13 @@
   <p:extLst>
     <p:ext uri="{521415D9-36F7-43E2-AB2F-B90AF26B5E84}">
       <p14:sectionLst xmlns:p14="http://schemas.microsoft.com/office/powerpoint/2010/main">
-        <p14:section name="Opening" id="{81951b36-e176-b607-4903-88d0912e049a}">
+        <p14:section name="Opening" id="{f32ef8ec-a909-dd0d-81b8-c84253a8dea6}">
           <p14:sldIdLst>
             <p14:sldId id="256"/>
             <p14:sldId id="257"/>
           </p14:sldIdLst>
         </p14:section>
-        <p14:section name="Principles" id="{e87f7582-448a-9605-0b25-b85712844d2a}">
+        <p14:section name="Principles" id="{86c05dea-a076-2d40-018c-b8ab6b167617}">
           <p14:sldIdLst>
             <p14:sldId id="258"/>
             <p14:sldId id="259"/>
@@ -147,14 +147,14 @@
             <p14:sldId id="261"/>
           </p14:sldIdLst>
         </p14:section>
-        <p14:section name="ECIL 7 schedule" id="{2795d9a0-d5f8-2ee2-49ed-38bea1d31a90}">
+        <p14:section name="ECIL 7 schedule" id="{548faa0b-f280-974c-5b4c-b9f7824dc516}">
           <p14:sldIdLst>
             <p14:sldId id="262"/>
             <p14:sldId id="263"/>
             <p14:sldId id="264"/>
           </p14:sldIdLst>
         </p14:section>
-        <p14:section name="Vaccine by vaccine" id="{2e7484b2-1b1b-ae2c-40a9-47ed60871686}">
+        <p14:section name="Vaccine by vaccine" id="{7e7a348b-2bc4-3591-9549-e2f32c1950d1}">
           <p14:sldIdLst>
             <p14:sldId id="265"/>
             <p14:sldId id="266"/>
@@ -163,13 +163,13 @@
             <p14:sldId id="269"/>
           </p14:sldIdLst>
         </p14:section>
-        <p14:section name="Children and contacts" id="{844a5d11-385b-dfe4-619a-f9c155b024bd}">
+        <p14:section name="Children and contacts" id="{d13393d3-7a3d-9e55-8ff6-8f678083e790}">
           <p14:sldIdLst>
             <p14:sldId id="270"/>
             <p14:sldId id="271"/>
           </p14:sldIdLst>
         </p14:section>
-        <p14:section name="Board questions" id="{c0129ba0-adac-0b0b-d8d4-a2b2cc480b5d}">
+        <p14:section name="Board questions" id="{170aa3b0-dc71-996a-185b-b13b2e504ace}">
           <p14:sldIdLst>
             <p14:sldId id="272"/>
             <p14:sldId id="273"/>
@@ -179,13 +179,13 @@
             <p14:sldId id="277"/>
           </p14:sldIdLst>
         </p14:section>
-        <p14:section name="References" id="{cf49886f-610e-e351-5a9f-2e40292996f5}">
+        <p14:section name="References" id="{28850380-597d-f514-e97a-122c46cc2c54}">
           <p14:sldIdLst>
             <p14:sldId id="278"/>
             <p14:sldId id="279"/>
           </p14:sldIdLst>
         </p14:section>
-        <p14:section name="Backup" id="{e5d04149-b59d-579b-4022-4b56ec9eb71e}">
+        <p14:section name="Backup" id="{2cda0c49-dcb9-edf2-bf16-fb2594822fbe}">
           <p14:sldIdLst>
             <p14:sldId id="280"/>
             <p14:sldId id="281"/>
@@ -612,7 +612,7 @@
             </a:pPr>
             <a:r>
               <a:rPr lang="en-US" dirty="0"/>
-              <a:t>各位好，今天是第 17 堂，主題是移植後的疫苗接種，內容來自 EBMT Handbook 第八版第 29 章，作者是 de la Cámara 和 Meisel。這一章篇幅不長，可是時間點、劑數、禁忌條件非常密集，考題幾乎都從這些數字出。前半段講原則和 ECIL 7 的成人時程，後半段逐一看各個疫苗、兒童和家屬，最後用三題收尾。</a:t>
+              <a:t>各位好，今天是第 17 堂，主題是移植後的疫苗接種，內容來自 EBMT Handbook 第八版第 29 章，作者是 de la Cámara 和 Meisel。這一章篇幅不長，但時間點、劑數、禁忌條件非常密集，考題多半從這些數字出。前半段講原則和 ECIL 7 的成人時程，後半段看各個疫苗、兒童和家屬，最後三題收尾。</a:t>
             </a:r>
           </a:p>
         </p:txBody>
@@ -715,7 +715,7 @@
             </a:pPr>
             <a:r>
               <a:rPr lang="en-US" dirty="0"/>
-              <a:t>Pneumococcus 有兩類疫苗。Conjugate vaccine，書上寫的是 13 價，有些國家用 10 價，T-cell-dependent，有 boost 效果。五個試驗三劑之後的反應率 54 到 98%，其中四個用 7 價、一個用 13 價，遠比 polysaccharide 好。Allo-HCT 後三個月開始，不輸給九個月開始。</a:t>
+              <a:t>Pneumococcus 有兩類疫苗。Conjugate vaccine，書上寫的是 13 價，有些國家用 10 價，T-cell-dependent，有 boost 效果。五個試驗三劑之後的反應率 54 到 98%，其中四個用 7 價、一個用 13 價，遠比 polysaccharide 好。Allo-HCT 後三個月開始，不輸給九個月開始。病人之所以得到 invasive pneumococcal disease，很多時候不是疫苗沒效，而是根本沒有打。三個月開始這個時間點，就是要盡早把這段空窗補起來。</a:t>
             </a:r>
           </a:p>
           <a:p>
@@ -726,7 +726,7 @@
             </a:pPr>
             <a:r>
               <a:rPr lang="en-US" dirty="0"/>
-              <a:t>PPSV23 是 polysaccharide，T-cell-independent，沒有 boost 效果，GVHD 時反應特別差。它的角色是在 PCV 之後擴大和加強反應，部分 PCV 沒反應的人打了 PPSV23 會有反應。所以順序永遠是 PCV 在前。</a:t>
+              <a:t>PPSV23 是 polysaccharide，T-cell-independent，沒有 boost 效果，GVHD 時反應特別差。它的角色是在 PCV 之後擴大和加強反應，部分 PCV 沒反應的人打了 PPSV23 會有反應。所以順序永遠是 PCV 在前。有 GVHD 的病人尤其如此，polysaccharide 打了也沒有反應，所以第四劑直接換成 PCV。</a:t>
             </a:r>
           </a:p>
           <a:p>
@@ -873,7 +873,7 @@
             </a:pPr>
             <a:r>
               <a:rPr lang="en-US" dirty="0"/>
-              <a:t>疫苗效果方面，一個回溯研究顯示病毒確診感染減少約 80%。六個月內打，血清反應很差，不過三個月起就能加強細胞免疫，所以流行時可以提早。接種前一年內用過 rituximab、active GVHD、淋巴球低，都會讓反應變差。第二劑的好處只有邊際，留給嚴重 GVHD、淋巴球低或三個月就提早打的人。兒童有一個 phase II 試驗，高劑量 60 μg 比標準 15 μg 免疫原性更好，但注射部位反應較多。</a:t>
+              <a:t>疫苗效果方面，一個回溯研究顯示病毒確診感染減少約 80%。六個月內打，血清反應很差，不過三個月起就能加強細胞免疫，所以流行時可以提早。接種前一年內用過 rituximab、active GVHD、淋巴球低，都會讓反應變差。第二劑的好處只有邊際，留給嚴重 GVHD、淋巴球低或三個月就提早打的人。兒童有一個 phase II 試驗，高劑量 60 μg 比標準 15 μg 免疫原性更好，但注射部位反應較多。高劑量在成人 HCT 的角色，書上沒有給結論。</a:t>
             </a:r>
           </a:p>
           <a:p>
@@ -1009,7 +1009,18 @@
             </a:pPr>
             <a:r>
               <a:rPr lang="en-US" dirty="0"/>
-              <a:t>右邊是 adjuvanted subunit vaccine，recombinant gE 加上 AS01B adjuvant，肌肉注射兩劑，相隔 60 天，核准用於 18 歲以上、帶狀疱疹高風險的成人。Bastidas 2019 在 auto-HCT 的 phase 3 試驗，第一劑在移植後 50 到 70 天，第二劑一到兩個月後，預防 zoster 的效力 68.2%，預防 post-herpetic neuralgia 89%。NCCN 建議用於 auto-HCT，allo 可以考慮，但 allo 沒有 randomized data，效果和安全性尚未建立。</a:t>
+              <a:t>右邊是 adjuvanted subunit vaccine，recombinant gE 加上 AS01B adjuvant，肌肉注射兩劑，相隔 60 天，核准用於 18 歲以上、帶狀疱疹高風險的成人。Bastidas 2019 在 auto-HCT 的 phase 3 試驗，第一劑在移植後 50 到 70 天，第二劑一到兩個月後，預防 zoster 的效力 68.2%，預防 post-herpetic neuralgia 89%。NCCN 建議用於 auto-HCT，allo 可以考慮，但 allo 沒有 randomized data，效果和安全性尚未建立。這個試驗發表在 ECIL 7 之後，所以 ECIL 指引沒有評論它，但很多中心已經把它放進常規時程。</a:t>
+            </a:r>
+          </a:p>
+          <a:p>
+            <a:pPr>
+              <a:spcAft>
+                <a:spcPts val="600"/>
+              </a:spcAft>
+            </a:pPr>
+            <a:r>
+              <a:rPr lang="en-US" dirty="0"/>
+              <a:t>考題常見的組合是 auto-HCT 後兩三個月的病人，問哪一種 zoster 疫苗有證據，答案就是右邊這個。</a:t>
             </a:r>
           </a:p>
         </p:txBody>
@@ -1112,7 +1123,7 @@
             </a:pPr>
             <a:r>
               <a:rPr lang="en-US" dirty="0"/>
-              <a:t>HBV 疫苗在移植後只有 40 到 70% 的人 anti-HBs 超過 10，比健康人差很多。可是沒有反應的人打了也有好處。移植前 HBsAg 陰性、但有 anti-HBs 或 anti-HBc 的人，就是 resolved infection，移植後有 reverse seroconversion 的風險。Takahata 2014 顯示，即使是疫苗 non-responder，接種也能預防 reverse seroconversion，推測是疫苗誘發的 memory T cell 和 cytotoxic T cell 在作用。這一點在 HBV 盛行的台灣特別實用。</a:t>
+              <a:t>HBV 疫苗在移植後只有 40 到 70% 的人 anti-HBs 超過 10，比健康人差很多。可是沒有反應的人打了也有好處。移植前 HBsAg 陰性、但有 anti-HBs 或 anti-HBc 的人，就是 resolved infection，移植後有 reverse seroconversion 的風險。Takahata 2014 顯示，即使是疫苗 non-responder，接種也能預防 reverse seroconversion，推測是疫苗誘發的 memory T cell 和 cytotoxic T cell 在作用。這一點在 HBV 盛行的台灣特別實用。這更加強了 HBV 疫苗的必要性。</a:t>
             </a:r>
           </a:p>
           <a:p>
@@ -1123,7 +1134,7 @@
             </a:pPr>
             <a:r>
               <a:rPr lang="en-US" dirty="0"/>
-              <a:t>大部分疫苗打前打後都不需要驗血清，例外就列在下面。HBV 在第三劑後一個月以上驗 anti-HBs，低於 10 就考慮再一輪三劑，IDSA 建議青少年和成人用 40 μg 的高劑量，但第二輪的效益不確定。成人打 measles 前要驗抗體，陰性才打；考慮 varicella vaccine 時也只給血清陰性的人。</a:t>
+              <a:t>大部分疫苗打前打後都不需要驗血清，例外就列在下面。HBV 在第三劑後一個月以上驗 anti-HBs，低於 10 就考慮再一輪三劑，IDSA 建議青少年和成人用 40 μg 的高劑量，但第二輪的效益不確定。成人打 measles 前要驗抗體，陰性才打；考慮 varicella vaccine 時也只給血清陰性的人。Pneumococcal 抗體可以在 24 個月驗，但驗完要補一劑還是重打整套，還要前瞻性研究。</a:t>
             </a:r>
           </a:p>
           <a:p>
@@ -1362,7 +1373,7 @@
             </a:pPr>
             <a:r>
               <a:rPr lang="en-US" dirty="0"/>
-              <a:t>兒童有自己的共識，是 EBMT 小兒工作組 2021 年的建議，Ifversen 2021，也就是 Fig. 29.1。灰色是 routine，移植後六個月開始用新生兒的六合一 DTaP-IPV-HBV-Hib 加上 PCV13，連續三個月各一劑，十八個月再補一劑。只要白血球已經 engraft、血小板 50 以上就開始，不管 donor 或 graft 種類、GVHD、免疫抑制或免疫重建的指標，而且不論實際年齡都用這個六合一。</a:t>
+              <a:t>兒童有自己的共識，是 EBMT 小兒工作組 2021 年的建議，Ifversen 2021，也就是 Fig. 29.1。灰色是 routine，移植後六個月開始用新生兒的六合一 DTaP-IPV-HBV-Hib 加上 PCV13，連續三個月各一劑，十八個月再補一劑。只要白血球已經 engraft、血小板 50 以上就開始，不管 donor 或 graft 種類、GVHD、免疫抑制或免疫重建的指標，而且不論實際年齡都用這個六合一。這個 fixed time point 的做法，是根據英國的回溯資料、德國的 IKAST 前瞻性試驗，以及 PCV13 的試驗。和成人比較，兒童的特點是不看 GVHD 或免疫重建，到時間就打。</a:t>
             </a:r>
           </a:p>
           <a:p>
@@ -1384,7 +1395,7 @@
             </a:pPr>
             <a:r>
               <a:rPr lang="en-US" dirty="0"/>
-              <a:t>Influenza 每年打，移植後第一次要兩劑。在 IVIG 補充期間打 non-live vaccine 是安全的，只是可能沒反應，停 IVIG 三個月後再驗抗體。</a:t>
+              <a:t>Influenza 每年打，移植後第一次要兩劑。在 IVIG 補充期間打 non-live vaccine 是安全的，只是可能沒反應，停 IVIG 三個月後再驗抗體。COVID-19 疫苗只要是 non-live、non-replicating，也建議所有 allo-HCT 的孩子打，可以提早到三個月。</a:t>
             </a:r>
           </a:p>
         </p:txBody>
@@ -1498,7 +1509,7 @@
             </a:pPr>
             <a:r>
               <a:rPr lang="en-US" dirty="0"/>
-              <a:t>家人和醫護每年打 inactivated influenza。血清陰性的人打 varicella 兩劑，相隔至少 28 天，接種後出疹就要避免接觸病人，直到疹子結痂。</a:t>
+              <a:t>家人和醫護每年打 inactivated influenza。血清陰性的人打 varicella 兩劑，相隔至少 28 天，接種後出疹就要避免接觸病人，直到疹子結痂。醫護人員方面，除了 influenza，血清陰性的人也要打 measles。</a:t>
             </a:r>
           </a:p>
           <a:p>
@@ -1612,7 +1623,18 @@
             </a:pPr>
             <a:r>
               <a:rPr lang="en-US" dirty="0"/>
-              <a:t>第一題。46 歲男性，matched sibling allo-HCT 治療 AML 之後七個月，有輕微的口腔和皮膚 chronic GVHD，用 prednisolone 每天 10 mg 加 cyclosporine 控制住。沒用過 rituximab、ATG 或 IVIG，血小板 12 萬。今天要打疫苗，哪個計畫最適當。先判斷每個選項是 live 還是 non-live，再看移植後的月數。</a:t>
+              <a:t>第一題。46 歲男性，matched sibling allo-HCT 治療 AML 之後七個月，有輕微的口腔和皮膚 chronic GVHD，用 prednisolone 每天 10 mg 加 cyclosporine 控制住。沒用過 rituximab、ATG 或 IVIG，血小板 12 萬。今天要打疫苗，哪個計畫最適當。</a:t>
+            </a:r>
+          </a:p>
+          <a:p>
+            <a:pPr>
+              <a:spcAft>
+                <a:spcPts val="600"/>
+              </a:spcAft>
+            </a:pPr>
+            <a:r>
+              <a:rPr lang="en-US" dirty="0"/>
+              <a:t>選項 A 是等免疫抑制停掉再全部一起打，B 是現在打 PCV 和 inactivated influenza，C 是血清陰性就打 MMR，D 是 Zostavax，E 是等 CD4 超過 200。先判斷每個選項是 live 還是 non-live，再看移植後的月數。</a:t>
             </a:r>
           </a:p>
           <a:p>
@@ -1740,6 +1762,17 @@
               <a:t>A 是最大的陷阱，很多人直覺要等免疫抑制停掉，但書上說延後 non-live vaccine 應該是例外，可以延後的只有 rituximab、IgG 低於 3、病情不穩和正在用 ATG。C 的 MMR 是 live vaccine，要滿 24 個月、沒有 GVHD 也沒有免疫抑制。D 的 Zostavax 永遠禁忌。E 的 CD4 門檻沒有數據支持。cGVHD 病人感染風險更高，即使反應打折，打的獲益還是比較大。</a:t>
             </a:r>
           </a:p>
+          <a:p>
+            <a:pPr>
+              <a:spcAft>
+                <a:spcPts val="600"/>
+              </a:spcAft>
+            </a:pPr>
+            <a:r>
+              <a:rPr lang="en-US" dirty="0"/>
+              <a:t>這題的關鍵字是 controlled，看到控制住的 GVHD，就想到不要延後 non-live vaccine。</a:t>
+            </a:r>
+          </a:p>
         </p:txBody>
       </p:sp>
       <p:sp>
@@ -1850,6 +1883,17 @@
               </a:spcAft>
             </a:pPr>
             <a:r>
+              <a:rPr lang="en-US" dirty="0"/>
+              <a:t>選項 A 是今天就打，因為已經超過 24 個月；B 是延到最後一次 IVIG 之後至少三個月，理想是八個月；C 是 allo-HCT 後永遠不打 MMR；D 是等 CD4 超過 200；E 是今天和 live zoster vaccine 一起打。</a:t>
+            </a:r>
+          </a:p>
+          <a:p>
+            <a:pPr>
+              <a:spcAft>
+                <a:spcPts val="600"/>
+              </a:spcAft>
+            </a:pPr>
+            <a:r>
               <a:rPr lang="en-US" b="1" dirty="0"/>
               <a:t>[Pause for answers.]</a:t>
             </a:r>
@@ -1965,7 +2009,7 @@
             </a:pPr>
             <a:r>
               <a:rPr lang="en-US" dirty="0"/>
-              <a:t>第二段是 ECIL 7 的成人時程，也就是書上的 Table 29.1，我會拆成兩張表，再整理成一條從三個月到二十四個月的時間軸。</a:t>
+              <a:t>第二段是 ECIL 7 的成人時程，也就是書上的 Table 29.1，我會拆成兩張表，再整理成一條從三個月到二十四個月的時間軸。整堂課最常出現的三個時間點是三個月、六個月和二十四個月，請大家在每一張表上留意它們分別對應哪一類疫苗。</a:t>
             </a:r>
           </a:p>
           <a:p>
@@ -2093,6 +2137,17 @@
               <a:t>A 是主要陷阱，只看 24 個月，忽略了 IVIG。這個條件只影響 live vaccine，如果今天要打的是 PCV 或 influenza，IVIG 不是延後的理由。C 不對，MMR 在符合條件時是建議施打的。D 的 CD4 門檻沒有數據。E 的 live zoster vaccine 在所有指引都是禁忌。</a:t>
             </a:r>
           </a:p>
+          <a:p>
+            <a:pPr>
+              <a:spcAft>
+                <a:spcPts val="600"/>
+              </a:spcAft>
+            </a:pPr>
+            <a:r>
+              <a:rPr lang="en-US" dirty="0"/>
+              <a:t>所以 live vaccine 的題目，要把條件逐一檢查完，時間、血清、GVHD、免疫抑制、復發、IVIG，一項都不能漏。</a:t>
+            </a:r>
+          </a:p>
         </p:txBody>
       </p:sp>
       <p:sp>
@@ -2203,6 +2258,17 @@
               </a:spcAft>
             </a:pPr>
             <a:r>
+              <a:rPr lang="en-US" dirty="0"/>
+              <a:t>選項 A 是因為血清陽性，現在打 Zostavax；B 是 adjuvanted recombinant zoster vaccine 兩劑，間隔一到兩個月，從現在開始；C 是十二個月時打 live varicella vaccine；D 是不打疫苗，acyclovir 吃五年；E 是等 CD4 超過 200 再打任何一種。</a:t>
+            </a:r>
+          </a:p>
+          <a:p>
+            <a:pPr>
+              <a:spcAft>
+                <a:spcPts val="600"/>
+              </a:spcAft>
+            </a:pPr>
+            <a:r>
               <a:rPr lang="en-US" b="1" dirty="0"/>
               <a:t>[Pause for answers.]</a:t>
             </a:r>
@@ -2321,6 +2387,17 @@
               <a:t>A 是陷阱，血清陽性不代表 Zostavax 可以打，它的病毒量比 varicella vaccine 高十四倍以上，所有指引都禁忌。C 的 live varicella vaccine 要超過 24 個月，而且是給血清陰性的人。D 的 acyclovir 在 auto-HCT 一般給三到六個月。E 的 CD4 門檻同樣沒有依據。</a:t>
             </a:r>
           </a:p>
+          <a:p>
+            <a:pPr>
+              <a:spcAft>
+                <a:spcPts val="600"/>
+              </a:spcAft>
+            </a:pPr>
+            <a:r>
+              <a:rPr lang="en-US" dirty="0"/>
+              <a:t>Allo-HCT 的病人如果問同樣的問題，答案就不同了，因為 allo 沒有 randomized data，只能個別考慮。</a:t>
+            </a:r>
+          </a:p>
         </p:txBody>
       </p:sp>
       <p:sp>
@@ -2669,7 +2746,7 @@
           <a:p>
             <a:r>
               <a:rPr lang="en-US" dirty="0"/>
-              <a:t>兒童的六個原則。固定六個月開始六合一和 PCV13，不管 GVHD 或免疫抑制；optional 疫苗盡量從十二個月開始，不要干擾 routine。Live MMR-V 要 24 個月以上，停免疫抑制和沒有 GVHD 至少三個月；有 GVHD、免疫抑制或 IVIG 的孩子，在第一輪前後驗抗體。</a:t>
+              <a:t>兒童共識的幾個原則。固定六個月開始六合一和 PCV13，不管 GVHD 或免疫抑制；optional 疫苗盡量從十二個月開始，不要干擾 routine。Live MMR-V 要 24 個月以上，停免疫抑制和沒有 GVHD 至少三個月；有 GVHD、免疫抑制或 IVIG 的孩子，在第一輪前後驗抗體。</a:t>
             </a:r>
             <a:endParaRPr lang="en-US" dirty="0"/>
           </a:p>
@@ -2997,7 +3074,7 @@
             </a:pPr>
             <a:r>
               <a:rPr lang="en-US" dirty="0"/>
-              <a:t>左邊是 non-live vaccine，包括 inactivated、subunit、conjugate，安全性和一般人一樣，也沒有證據會誘發或加重 GVHD，唯一的例外是 SARS-CoV-2 疫苗。</a:t>
+              <a:t>左邊是 non-live vaccine，包括 inactivated、subunit、conjugate，安全性和一般人一樣，也沒有證據會誘發或加重 GVHD，唯一的例外是 SARS-CoV-2 疫苗。書上也提醒，現有的研究多半是 BM 或 PB、MAC 的病人，cord blood、RIC 和 haplo 的經驗很少，所以這些族群的建議主要是外推。</a:t>
             </a:r>
           </a:p>
           <a:p>
@@ -3133,7 +3210,7 @@
             </a:pPr>
             <a:r>
               <a:rPr lang="en-US" dirty="0"/>
-              <a:t>IVIG 不會抑制 non-live vaccine 的反應，只影響 live vaccine，要隔至少三個月，理想是八個月。考題很喜歡拿 controlled cGVHD 或 CD4 數字當陷阱。</a:t>
+              <a:t>IVIG 不會抑制 non-live vaccine 的反應，只影響 live vaccine，要隔至少三個月，理想是八個月。考題很喜歡拿 controlled cGVHD 或 CD4 數字當陷阱。Rituximab 的影響特別長，流感疫苗前一年內用過 rituximab，就常常產生不了保護性抗體。病人如果剛因為 PTLD 或 cGVHD 用了 rituximab，整個計畫要往後挪。</a:t>
             </a:r>
           </a:p>
         </p:txBody>
@@ -3261,6 +3338,17 @@
               <a:t>最後是給藥途徑。很多疫苗是肌肉注射，血小板低於 50 時，IPV 和 PCV 可以改皮下，influenza 可以打皮內。血小板在 30 到 50 以上、用 23 號或更細的針、壓兩分鐘，肌肉注射是安全的。劑量和一般人相同，劑與劑之間至少隔一個月。</a:t>
             </a:r>
           </a:p>
+          <a:p>
+            <a:pPr>
+              <a:spcAft>
+                <a:spcPts val="600"/>
+              </a:spcAft>
+            </a:pPr>
+            <a:r>
+              <a:rPr lang="en-US" dirty="0"/>
+              <a:t>這張表背後的邏輯是 T cell 的重建比 B cell 慢。Conjugate vaccine 把多醣接在蛋白上，可以借用 T cell 的幫忙，所以在 GVHD 和免疫抑制下仍然有效；純 polysaccharide 疫苗完全靠 B cell，移植後早期幾乎打不出反應。這也是為什麼 pneumococcus 要先打 PCV，再用 PPSV23 擴大涵蓋。</a:t>
+            </a:r>
+          </a:p>
         </p:txBody>
       </p:sp>
       <p:sp>
@@ -3361,7 +3449,7 @@
             </a:pPr>
             <a:r>
               <a:rPr lang="en-US" dirty="0"/>
-              <a:t>這是 ECIL 7 的建議，Cordonnier 2019，也就是書上的 Table 29.1 前半。最早開始的是 pneumococcal conjugate vaccine，移植後三個月開始，三劑，證據等級 AI，是整張表唯一的 A-I。第四劑在十二個月給 23 價的 polysaccharide vaccine，距離最後一劑 PCV 至少八週；如果有 GVHD，polysaccharide 反應差，第四劑改用 PCV。</a:t>
+              <a:t>這是 ECIL 7 的建議，Cordonnier 2019，也就是書上的 Table 29.1 前半。最早開始的是 pneumococcal conjugate vaccine，移植後三個月開始，三劑，證據等級 AI，是整張表唯一的 A-I。第四劑在十二個月給 23 價的 polysaccharide vaccine，距離最後一劑 PCV 至少八週；如果有 GVHD，polysaccharide 反應差，第四劑改用 PCV。考題常把 PCV 三個月和 influenza 六個月對調，或者把 PPSV23 放到最前面，這兩個陷阱要特別小心。</a:t>
             </a:r>
           </a:p>
           <a:p>
@@ -3384,6 +3472,17 @@
             <a:r>
               <a:rPr lang="en-US" dirty="0"/>
               <a:t>Hib conjugate 三劑，三或六個月開始。Diphtheria-tetanus 從六個月開始，DT 比 Td 好；acellular pertussis 和 inactivated polio 在六到十二個月，各三劑，這三種劑間隔一到兩個月。Meningococcal conjugate 兩劑，從六個月開始，依各國建議和當地盛行率。其他沒特別註明的，劑間隔一個月。Auto-HCT 用同一份時程，只是部分證據等級不同。</a:t>
+            </a:r>
+          </a:p>
+          <a:p>
+            <a:pPr>
+              <a:spcAft>
+                <a:spcPts val="600"/>
+              </a:spcAft>
+            </a:pPr>
+            <a:r>
+              <a:rPr lang="en-US" dirty="0"/>
+              <a:t>另外，表上的時間是開始的時間，不是唯一的時間。病人如果因為上一張講的理由延後，回來之後還是從頭照順序補齊，不需要因為晚打而減少劑數。</a:t>
             </a:r>
           </a:p>
         </p:txBody>
@@ -3486,7 +3585,7 @@
             </a:pPr>
             <a:r>
               <a:rPr lang="en-US" dirty="0"/>
-              <a:t>Table 29.1 的後半，每一個都有附帶條件。Hepatitis B 分三種人。移植前血清陰性，或移植前打過但六個月時已經沒有抗體，在六到十二個月打三劑，0、1、6 個月。以前感染過、anti-HBs 低於 10 的人，同樣六到十二個月開始。比較特別的是血清陰性的病人配上 anti-HBc 陽性的 donor，要在移植前就打。</a:t>
+              <a:t>Table 29.1 的後半，每一個都有附帶條件。Hepatitis B 分三種人。移植前血清陰性，或移植前打過但六個月時已經沒有抗體，在六到十二個月打三劑，0、1、6 個月。以前感染過、anti-HBs 低於 10 的人，同樣六到十二個月開始。比較特別的是血清陰性的病人配上 anti-HBc 陽性的 donor，要在移植前就打。這個情況的目的，是讓病人在移植前先有保護，避免從 donor 這端帶來 HBV 的風險。打完三劑之後一到兩個月，anti-HBs 仍然低於 10 的人，可以考慮再給一輪三劑，不過第二輪的效益並不確定。</a:t>
             </a:r>
           </a:p>
           <a:p>
@@ -3497,7 +3596,7 @@
             </a:pPr>
             <a:r>
               <a:rPr lang="en-US" dirty="0"/>
-              <a:t>HPV 依各國一般族群的建議，六到十二個月開始。接著是 live vaccine。Measles 要血清陰性，而且沒有 GVHD、沒有免疫抑制、沒有復發、近幾個月沒有 IVIG，最早 24 個月；只有在 measles 流行、免疫抑制輕微時，可以提早到十二個月，這個等級只有 CIII。Rubella 的對象是血清陰性、有生育可能的女性。</a:t>
+              <a:t>HPV 依各國一般族群的建議，六到十二個月開始。接著是 live vaccine。Measles 要血清陰性，而且沒有 GVHD、沒有免疫抑制、沒有復發、近幾個月沒有 IVIG，最早 24 個月；只有在 measles 流行、免疫抑制輕微時，可以提早到十二個月，這個等級只有 CIII。Rubella 的對象是血清陰性、有生育可能的女性。另外要知道，這些 live vaccine 在 24 個月之前、或有 active GVHD 和免疫抑制時，書上一律寫成禁忌，等級 DIII。成人兩劑 varicella 是選項，不是常規。</a:t>
             </a:r>
           </a:p>
           <a:p>
@@ -3622,7 +3721,7 @@
             </a:pPr>
             <a:r>
               <a:rPr lang="en-US" dirty="0"/>
-              <a:t>最後一格是黑色的，因為只有它是 live vaccine，MMR 和 varicella，要等 24 個月以上，而且病人要完全符合條件。前面四格全部是 non-live，GVHD 控制住就照表打。</a:t>
+              <a:t>最後一格是黑色的，因為只有它是 live vaccine，MMR 和 varicella，要等 24 個月以上，而且病人要完全符合條件。前面四格全部是 non-live，GVHD 控制住就照表打。時間軸上的劑數都是三劑，只有 meningococcal 兩劑、PPSV23 一劑、influenza 每年一劑。記劑數的時候，可以記成 non-live 的基本系列三劑、間隔至少一個月。</a:t>
             </a:r>
           </a:p>
           <a:p>
@@ -7368,7 +7467,7 @@
                   <a:schemeClr val="tx1"/>
                 </a:solidFill>
               </a:rPr>
-              <a:t>Seronegative only, &gt; 24 m, strict criteria</a:t>
+              <a:t>Seronegative, &gt; 24 m, all criteria</a:t>
             </a:r>
             <a:endParaRPr lang="en-US" sz="1500" dirty="0"/>
           </a:p>
@@ -7708,7 +7807,7 @@
                   <a:schemeClr val="tx1"/>
                 </a:solidFill>
               </a:rPr>
-              <a:t>Auto RCT: 68.2% efficacy; allo unproven</a:t>
+              <a:t>Auto RCT 68.2%; allo unproven</a:t>
             </a:r>
             <a:endParaRPr lang="en-US" sz="1500" dirty="0"/>
           </a:p>
@@ -10067,7 +10166,7 @@
                   <a:schemeClr val="tx1"/>
                 </a:solidFill>
               </a:rPr>
-              <a:t>Children restart combination vaccines at a fixed 6 months</a:t>
+              <a:t>Children restart at a fixed 6 months</a:t>
             </a:r>
             <a:endParaRPr lang="en-US" sz="3600" dirty="0"/>
           </a:p>
@@ -10127,8 +10226,8 @@
         </p:blipFill>
         <p:spPr>
           <a:xfrm>
-            <a:off x="685800" y="2148840"/>
-            <a:ext cx="5056072" cy="3749040"/>
+            <a:off x="685800" y="1691640"/>
+            <a:ext cx="5672667" cy="4206240"/>
           </a:xfrm>
           <a:prstGeom prst="rect">
             <a:avLst/>
@@ -10143,8 +10242,8 @@
         </p:nvSpPr>
         <p:spPr>
           <a:xfrm>
-            <a:off x="7825252" y="2240280"/>
-            <a:ext cx="3677900" cy="3657600"/>
+            <a:off x="7825252" y="1783080"/>
+            <a:ext cx="3677900" cy="4114800"/>
           </a:xfrm>
           <a:prstGeom prst="rect">
             <a:avLst/>
@@ -11602,7 +11701,7 @@
                   <a:schemeClr val="tx1"/>
                 </a:solidFill>
               </a:rPr>
-              <a:t>Answer B: controlled GVHD does not delay non-live vaccines</a:t>
+              <a:t>Answer B: give non-live vaccines despite controlled GVHD</a:t>
             </a:r>
             <a:endParaRPr lang="en-US" sz="3600" dirty="0"/>
           </a:p>
@@ -13032,7 +13131,7 @@
                   <a:schemeClr val="tx1"/>
                 </a:solidFill>
               </a:rPr>
-              <a:t>Answer B: live vaccines wait 3 to 8 months after IVIG</a:t>
+              <a:t>Answer B: wait 3–8 months after IVIG</a:t>
             </a:r>
             <a:endParaRPr lang="en-US" sz="3600" dirty="0"/>
           </a:p>
@@ -13084,7 +13183,7 @@
         </p:nvSpPr>
         <p:spPr>
           <a:xfrm>
-            <a:off x="685800" y="2240280"/>
+            <a:off x="685800" y="1783080"/>
             <a:ext cx="10817352" cy="731520"/>
           </a:xfrm>
           <a:prstGeom prst="rect">
@@ -13126,8 +13225,8 @@
         </p:nvSpPr>
         <p:spPr>
           <a:xfrm>
-            <a:off x="685800" y="3246120"/>
-            <a:ext cx="10817352" cy="2651760"/>
+            <a:off x="685800" y="2788920"/>
+            <a:ext cx="10817352" cy="3108960"/>
           </a:xfrm>
           <a:prstGeom prst="rect">
             <a:avLst/>
@@ -15392,7 +15491,7 @@
                   <a:schemeClr val="tx1"/>
                 </a:solidFill>
               </a:rPr>
-              <a:t>The paediatric consensus rests on six practical rules</a:t>
+              <a:t>The paediatric consensus rests on seven practical rules</a:t>
             </a:r>
             <a:endParaRPr lang="en-US" sz="3600" dirty="0"/>
           </a:p>
@@ -17432,7 +17531,7 @@
                   <a:schemeClr val="tx1"/>
                 </a:solidFill>
               </a:rPr>
-              <a:t>Safe; give on schedule even with GVHD</a:t>
+              <a:t>Safe; given even with GVHD</a:t>
             </a:r>
             <a:endParaRPr lang="en-US" sz="1500" dirty="0"/>
           </a:p>
@@ -18261,7 +18360,7 @@
                             <a:schemeClr val="tx1"/>
                           </a:solidFill>
                         </a:rPr>
-                        <a:t>Uncontrolled grade 3–4 aGVHD, infection or ICU</a:t>
+                        <a:t>Uncontrolled aGVHD 3–4, infection, ICU</a:t>
                       </a:r>
                       <a:endParaRPr lang="en-US" sz="1700" dirty="0"/>
                     </a:p>

--- a/slides/decks/s17-vaccination.pptx
+++ b/slides/decks/s17-vaccination.pptx
@@ -133,13 +133,13 @@
   <p:extLst>
     <p:ext uri="{521415D9-36F7-43E2-AB2F-B90AF26B5E84}">
       <p14:sectionLst xmlns:p14="http://schemas.microsoft.com/office/powerpoint/2010/main">
-        <p14:section name="Opening" id="{f32ef8ec-a909-dd0d-81b8-c84253a8dea6}">
+        <p14:section name="Opening" id="{72c8e5b6-cd55-0eec-dfee-b2510fd61cd7}">
           <p14:sldIdLst>
             <p14:sldId id="256"/>
             <p14:sldId id="257"/>
           </p14:sldIdLst>
         </p14:section>
-        <p14:section name="Principles" id="{86c05dea-a076-2d40-018c-b8ab6b167617}">
+        <p14:section name="Principles" id="{62e9d4e2-af97-fb9d-6555-b143ab981259}">
           <p14:sldIdLst>
             <p14:sldId id="258"/>
             <p14:sldId id="259"/>
@@ -147,14 +147,14 @@
             <p14:sldId id="261"/>
           </p14:sldIdLst>
         </p14:section>
-        <p14:section name="ECIL 7 schedule" id="{548faa0b-f280-974c-5b4c-b9f7824dc516}">
+        <p14:section name="ECIL 7 schedule" id="{9b44a51e-5a62-4474-f23a-e78704a836db}">
           <p14:sldIdLst>
             <p14:sldId id="262"/>
             <p14:sldId id="263"/>
             <p14:sldId id="264"/>
           </p14:sldIdLst>
         </p14:section>
-        <p14:section name="Vaccine by vaccine" id="{7e7a348b-2bc4-3591-9549-e2f32c1950d1}">
+        <p14:section name="Vaccine by vaccine" id="{7e94626c-702a-f2f5-c0ff-9895c1ee87e2}">
           <p14:sldIdLst>
             <p14:sldId id="265"/>
             <p14:sldId id="266"/>
@@ -163,13 +163,13 @@
             <p14:sldId id="269"/>
           </p14:sldIdLst>
         </p14:section>
-        <p14:section name="Children and contacts" id="{d13393d3-7a3d-9e55-8ff6-8f678083e790}">
+        <p14:section name="Children and contacts" id="{4a721054-1c89-46c8-6edf-ff7ec2dd320a}">
           <p14:sldIdLst>
             <p14:sldId id="270"/>
             <p14:sldId id="271"/>
           </p14:sldIdLst>
         </p14:section>
-        <p14:section name="Board questions" id="{170aa3b0-dc71-996a-185b-b13b2e504ace}">
+        <p14:section name="Board questions" id="{e51008c6-1b91-fc22-6f9f-567834883cfa}">
           <p14:sldIdLst>
             <p14:sldId id="272"/>
             <p14:sldId id="273"/>
@@ -179,13 +179,13 @@
             <p14:sldId id="277"/>
           </p14:sldIdLst>
         </p14:section>
-        <p14:section name="References" id="{28850380-597d-f514-e97a-122c46cc2c54}">
+        <p14:section name="References" id="{ff6623f4-6ade-c952-445b-98d482cb8fe5}">
           <p14:sldIdLst>
             <p14:sldId id="278"/>
             <p14:sldId id="279"/>
           </p14:sldIdLst>
         </p14:section>
-        <p14:section name="Backup" id="{2cda0c49-dcb9-edf2-bf16-fb2594822fbe}">
+        <p14:section name="Backup" id="{bc6c86b6-5121-9a02-4abd-421ae4c9277f}">
           <p14:sldIdLst>
             <p14:sldId id="280"/>
             <p14:sldId id="281"/>
